--- a/courses/learn_legalization/module03-01-fixed-macros/slides.pptx
+++ b/courses/learn_legalization/module03-01-fixed-macros/slides.pptx
@@ -16,6 +16,9 @@
     <p:sldId id="264" r:id="rId16"/>
     <p:sldId id="265" r:id="rId17"/>
     <p:sldId id="266" r:id="rId18"/>
+    <p:sldId id="267" r:id="rId19"/>
+    <p:sldId id="268" r:id="rId20"/>
+    <p:sldId id="269" r:id="rId21"/>
   </p:sldIdLst>
   <p:sldSz cx="12191695" cy="6858000" type="screen4x3"/>
   <p:notesSz cx="6858000" cy="9144000"/>
@@ -582,7 +585,7 @@
           <a:lstStyle/>
           <a:p>
             <a:r>
-              <a:t>Common traps: assuming snap alone legalizes; forgetting site width when checking overlap; ignoring fixed macro D at (8, 4); reporting HPWL without legality; and comparing Abacus and Tetris without naming displacement versus wirelength tradeoffs.</a:t>
+              <a:t>In the browser lab track, open the **fixed-macros** lab from the tools shelf. Open the interactive lab, place or snap cells on the site and row grid—or use an Apply helper—then Check. Reveal golden is study-only. Work the challenges that lock the goldens, then come back to implement the same loop yourself.</a:t>
             </a:r>
           </a:p>
         </p:txBody>
@@ -652,6 +655,146 @@
           <a:lstStyle/>
           <a:p>
             <a:r>
+              <a:t>In the implement track, open this module's EXAMPLES.md Pseudocode section and the course common solvers. Parse `tiny_legal.json`, run the algorithm with deterministic coordinates, and print legality, displacement, and HPWL. Match the browser goldens before you claim the checklist.</a:t>
+            </a:r>
+          </a:p>
+        </p:txBody>
+      </p:sp>
+      <p:sp>
+        <p:nvSpPr>
+          <p:cNvPr id="4" name="Slide Number Placeholder 3"/>
+          <p:cNvSpPr>
+            <a:spLocks noGrp="1"/>
+          </p:cNvSpPr>
+          <p:nvPr>
+            <p:ph type="sldNum" idx="5" sz="quarter"/>
+          </p:nvPr>
+        </p:nvSpPr>
+        <p:spPr/>
+      </p:sp>
+    </p:spTree>
+  </p:cSld>
+  <p:clrMapOvr>
+    <a:masterClrMapping/>
+  </p:clrMapOvr>
+</p:notes>
+</file>
+
+<file path=ppt/notesSlides/notesSlide12.xml><?xml version="1.0" encoding="utf-8"?>
+<p:notes xmlns:a="http://schemas.openxmlformats.org/drawingml/2006/main" xmlns:p="http://schemas.openxmlformats.org/presentationml/2006/main" xmlns:r="http://schemas.openxmlformats.org/officeDocument/2006/relationships">
+  <p:cSld>
+    <p:spTree>
+      <p:nvGrpSpPr>
+        <p:cNvPr id="1" name=""/>
+        <p:cNvGrpSpPr/>
+        <p:nvPr/>
+      </p:nvGrpSpPr>
+      <p:grpSpPr>
+        <a:xfrm>
+          <a:off x="0" y="0"/>
+          <a:ext cx="0" cy="0"/>
+          <a:chOff x="0" y="0"/>
+          <a:chExt cx="0" cy="0"/>
+        </a:xfrm>
+      </p:grpSpPr>
+      <p:sp>
+        <p:nvSpPr>
+          <p:cNvPr id="2" name="Slide Image Placeholder 1"/>
+          <p:cNvSpPr>
+            <a:spLocks noGrp="1"/>
+          </p:cNvSpPr>
+          <p:nvPr>
+            <p:ph type="sldImg" idx="2"/>
+          </p:nvPr>
+        </p:nvSpPr>
+        <p:spPr/>
+      </p:sp>
+      <p:sp>
+        <p:nvSpPr>
+          <p:cNvPr id="3" name="Notes Placeholder 2"/>
+          <p:cNvSpPr>
+            <a:spLocks noGrp="1"/>
+          </p:cNvSpPr>
+          <p:nvPr>
+            <p:ph type="body" idx="3" sz="quarter"/>
+          </p:nvPr>
+        </p:nvSpPr>
+        <p:spPr/>
+        <p:txBody>
+          <a:bodyPr/>
+          <a:lstStyle/>
+          <a:p>
+            <a:r>
+              <a:t>Common traps: assuming snap alone legalizes; forgetting site width when checking overlap; ignoring fixed macro D at (8, 4); reporting HPWL without legality; and comparing Abacus and Tetris without naming displacement versus wirelength tradeoffs.</a:t>
+            </a:r>
+          </a:p>
+        </p:txBody>
+      </p:sp>
+      <p:sp>
+        <p:nvSpPr>
+          <p:cNvPr id="4" name="Slide Number Placeholder 3"/>
+          <p:cNvSpPr>
+            <a:spLocks noGrp="1"/>
+          </p:cNvSpPr>
+          <p:nvPr>
+            <p:ph type="sldNum" idx="5" sz="quarter"/>
+          </p:nvPr>
+        </p:nvSpPr>
+        <p:spPr/>
+      </p:sp>
+    </p:spTree>
+  </p:cSld>
+  <p:clrMapOvr>
+    <a:masterClrMapping/>
+  </p:clrMapOvr>
+</p:notes>
+</file>
+
+<file path=ppt/notesSlides/notesSlide13.xml><?xml version="1.0" encoding="utf-8"?>
+<p:notes xmlns:a="http://schemas.openxmlformats.org/drawingml/2006/main" xmlns:p="http://schemas.openxmlformats.org/presentationml/2006/main" xmlns:r="http://schemas.openxmlformats.org/officeDocument/2006/relationships">
+  <p:cSld>
+    <p:spTree>
+      <p:nvGrpSpPr>
+        <p:cNvPr id="1" name=""/>
+        <p:cNvGrpSpPr/>
+        <p:nvPr/>
+      </p:nvGrpSpPr>
+      <p:grpSpPr>
+        <a:xfrm>
+          <a:off x="0" y="0"/>
+          <a:ext cx="0" cy="0"/>
+          <a:chOff x="0" y="0"/>
+          <a:chExt cx="0" cy="0"/>
+        </a:xfrm>
+      </p:grpSpPr>
+      <p:sp>
+        <p:nvSpPr>
+          <p:cNvPr id="2" name="Slide Image Placeholder 1"/>
+          <p:cNvSpPr>
+            <a:spLocks noGrp="1"/>
+          </p:cNvSpPr>
+          <p:nvPr>
+            <p:ph type="sldImg" idx="2"/>
+          </p:nvPr>
+        </p:nvSpPr>
+        <p:spPr/>
+      </p:sp>
+      <p:sp>
+        <p:nvSpPr>
+          <p:cNvPr id="3" name="Notes Placeholder 2"/>
+          <p:cNvSpPr>
+            <a:spLocks noGrp="1"/>
+          </p:cNvSpPr>
+          <p:nvPr>
+            <p:ph type="body" idx="3" sz="quarter"/>
+          </p:nvPr>
+        </p:nvSpPr>
+        <p:spPr/>
+        <p:txBody>
+          <a:bodyPr/>
+          <a:lstStyle/>
+          <a:p>
+            <a:r>
               <a:t>Complete the checklist for at least one track—preferably both. Implement until your metrics match the starter goldens. When you're ready, take the short quiz, then continue to the next module.</a:t>
             </a:r>
           </a:p>
@@ -725,12 +868,6 @@
               <a:t>Fixed cells are placed first; occupied intervals block shelf and Abacus trials on that row. Legality adds a macro check—any drift off the lock fails. Movable cells must route around macro sites, not slide through them.</a:t>
             </a:r>
           </a:p>
-          <a:p/>
-          <a:p>
-            <a:r>
-              <a:t>&lt;!-- algorithm-walkthrough --&gt;</a:t>
-            </a:r>
-          </a:p>
         </p:txBody>
       </p:sp>
       <p:sp>
@@ -798,7 +935,13 @@
           <a:lstStyle/>
           <a:p>
             <a:r>
-              <a:t>Cell D is a fixed macro at (8, 4) on the top row—width two covers sites eight and nine. Every legalizer must leave D untouched while packing movables around it.</a:t>
+              <a:t>Macro legalization adds one precondition to the Abacus sketch: place locked cells first. Their site intervals become obstacles for every later try-place on that row.</a:t>
+            </a:r>
+          </a:p>
+          <a:p/>
+          <a:p>
+            <a:r>
+              <a:t>Open this module's examples file and find the Pseudocode section. That written sketch is what you implement on the implement track and what the browser challenges measure.</a:t>
             </a:r>
           </a:p>
         </p:txBody>
@@ -868,7 +1011,7 @@
           <a:lstStyle/>
           <a:p>
             <a:r>
-              <a:t>Run Abacus with the fixed map: D is placed first, occupied sites on row four block C from sliding into the macro. Movable cells trial rows respecting blocked intervals.</a:t>
+              <a:t>The legality line in the sketch is new too—if D drifts off eight comma four, the packing fails even when overlaps are gone. On this instance Abacus still finishes legal with displacement four.</a:t>
             </a:r>
           </a:p>
         </p:txBody>
@@ -938,7 +1081,7 @@
           <a:lstStyle/>
           <a:p>
             <a:r>
-              <a:t>After Abacus with fixed macros, D remains at (8, 4). Legality report includes a macro check—any drift off the lock fails the run.</a:t>
+              <a:t>Cell D is a fixed macro at (8, 4) on the top row—width two covers sites eight and nine. Every legalizer must leave D untouched while packing movables around it.</a:t>
             </a:r>
           </a:p>
         </p:txBody>
@@ -1008,7 +1151,7 @@
           <a:lstStyle/>
           <a:p>
             <a:r>
-              <a:t>With D fixed, Abacus still legalizes A, B, C, E, and F with total displacement four—the same as the unconstrained Abacus run on this instance because D never moved in either.</a:t>
+              <a:t>Run Abacus with the fixed map: D is placed first, occupied sites on row four block C from sliding into the macro. Movable cells trial rows respecting blocked intervals.</a:t>
             </a:r>
           </a:p>
         </p:txBody>
@@ -1078,13 +1221,7 @@
           <a:lstStyle/>
           <a:p>
             <a:r>
-              <a:t>C lands on row four at x four—left of E at zero, right of the macro gap. Packing algorithms must treat fixed macros as obstacles, not soft preferences.</a:t>
-            </a:r>
-          </a:p>
-          <a:p/>
-          <a:p>
-            <a:r>
-              <a:t>&lt;!-- /algorithm-walkthrough --&gt;</a:t>
+              <a:t>After Abacus with fixed macros, D remains at (8, 4). Legality report includes a macro check—any drift off the lock fails the run.</a:t>
             </a:r>
           </a:p>
         </p:txBody>
@@ -1154,7 +1291,7 @@
           <a:lstStyle/>
           <a:p>
             <a:r>
-              <a:t>In the browser lab track, open the **fixed-macros** lab from the tools shelf. Load the overlap or float starter, run the legalizer once, and read legality plus displacement and HPWL when the panel shows them. Work the challenges that lock the goldens, then come back to implement the same loop yourself.</a:t>
+              <a:t>With D fixed, Abacus still legalizes A, B, C, E, and F with total displacement four—the same as the unconstrained Abacus run on this instance because D never moved in either.</a:t>
             </a:r>
           </a:p>
         </p:txBody>
@@ -1224,7 +1361,7 @@
           <a:lstStyle/>
           <a:p>
             <a:r>
-              <a:t>In the implement track, open this module's examples and the course `common/` solvers. Parse `tiny_legal.json`, run the algorithm with deterministic coordinates, and print legality, displacement, and HPWL. Match the browser goldens before you claim the checklist.</a:t>
+              <a:t>C lands on row four at x four—left of E at zero, right of the macro gap. Packing algorithms must treat fixed macros as obstacles, not soft preferences.</a:t>
             </a:r>
           </a:p>
         </p:txBody>
@@ -4382,21 +4519,45 @@
                 </a:solidFill>
                 <a:latin typeface="Calibri"/>
               </a:rPr>
-              <a:t>Pitfalls</a:t>
-            </a:r>
-          </a:p>
-        </p:txBody>
-      </p:sp>
-      <p:sp>
-        <p:nvSpPr>
-          <p:cNvPr id="3" name="TextBox 2"/>
+              <a:t>Movables avoid macro sites</a:t>
+            </a:r>
+          </a:p>
+        </p:txBody>
+      </p:sp>
+      <p:pic>
+        <p:nvPicPr>
+          <p:cNvPr id="3" name="Picture 2" descr="05-avoid-macro.png"/>
+          <p:cNvPicPr>
+            <a:picLocks noChangeAspect="1"/>
+          </p:cNvPicPr>
+          <p:nvPr/>
+        </p:nvPicPr>
+        <p:blipFill>
+          <a:blip r:embed="rId2"/>
+          <a:stretch>
+            <a:fillRect/>
+          </a:stretch>
+        </p:blipFill>
+        <p:spPr>
+          <a:xfrm>
+            <a:off x="548640" y="1143000"/>
+            <a:ext cx="9404113" cy="4572000"/>
+          </a:xfrm>
+          <a:prstGeom prst="rect">
+            <a:avLst/>
+          </a:prstGeom>
+        </p:spPr>
+      </p:pic>
+      <p:sp>
+        <p:nvSpPr>
+          <p:cNvPr id="4" name="TextBox 3"/>
           <p:cNvSpPr txBox="1"/>
           <p:nvPr/>
         </p:nvSpPr>
         <p:spPr>
           <a:xfrm>
-            <a:off x="548640" y="1234440"/>
-            <a:ext cx="11064240" cy="4937760"/>
+            <a:off x="548640" y="5897880"/>
+            <a:ext cx="11064240" cy="411480"/>
           </a:xfrm>
           <a:prstGeom prst="rect">
             <a:avLst/>
@@ -4409,32 +4570,26 @@
           </a:bodyPr>
           <a:lstStyle/>
           <a:p>
-            <a:pPr lvl="0" marL="457200" indent="-228600">
-              <a:buFont typeface="Calibri"/>
-              <a:spcAft>
-                <a:spcPts val="1000"/>
-              </a:spcAft>
-              <a:buSzPct val="100000"/>
-              <a:buChar char="•"/>
+            <a:pPr>
               <a:lnSpc>
                 <a:spcPts val="2200"/>
               </a:lnSpc>
             </a:pPr>
             <a:r>
-              <a:rPr sz="2000" b="0">
+              <a:rPr sz="1200" b="0">
                 <a:solidFill>
                   <a:srgbClr val="333333"/>
                 </a:solidFill>
                 <a:latin typeface="Calibri"/>
               </a:rPr>
-              <a:t>Common traps</a:t>
-            </a:r>
-          </a:p>
-        </p:txBody>
-      </p:sp>
-      <p:sp>
-        <p:nvSpPr>
-          <p:cNvPr id="4" name="TextBox 3"/>
+              <a:t>Movables avoid macro sites</a:t>
+            </a:r>
+          </a:p>
+        </p:txBody>
+      </p:sp>
+      <p:sp>
+        <p:nvSpPr>
+          <p:cNvPr id="5" name="TextBox 4"/>
           <p:cNvSpPr txBox="1"/>
           <p:nvPr/>
         </p:nvSpPr>
@@ -4523,6 +4678,557 @@
                 </a:solidFill>
                 <a:latin typeface="Calibri"/>
               </a:rPr>
+              <a:t>Browser lab track</a:t>
+            </a:r>
+          </a:p>
+        </p:txBody>
+      </p:sp>
+      <p:sp>
+        <p:nvSpPr>
+          <p:cNvPr id="3" name="TextBox 2"/>
+          <p:cNvSpPr txBox="1"/>
+          <p:nvPr/>
+        </p:nvSpPr>
+        <p:spPr>
+          <a:xfrm>
+            <a:off x="548640" y="1234440"/>
+            <a:ext cx="11064240" cy="4937760"/>
+          </a:xfrm>
+          <a:prstGeom prst="rect">
+            <a:avLst/>
+          </a:prstGeom>
+          <a:noFill/>
+        </p:spPr>
+        <p:txBody>
+          <a:bodyPr wrap="square">
+            <a:noAutofit/>
+          </a:bodyPr>
+          <a:lstStyle/>
+          <a:p>
+            <a:pPr lvl="0" marL="457200" indent="-228600">
+              <a:buFont typeface="Calibri"/>
+              <a:spcAft>
+                <a:spcPts val="1000"/>
+              </a:spcAft>
+              <a:buSzPct val="100000"/>
+              <a:buChar char="•"/>
+              <a:lnSpc>
+                <a:spcPts val="2200"/>
+              </a:lnSpc>
+            </a:pPr>
+            <a:r>
+              <a:rPr sz="2000" b="0">
+                <a:solidFill>
+                  <a:srgbClr val="333333"/>
+                </a:solidFill>
+                <a:latin typeface="Calibri"/>
+              </a:rPr>
+              <a:t>In the browser lab track, open the </a:t>
+            </a:r>
+            <a:r>
+              <a:rPr sz="2000" b="1">
+                <a:solidFill>
+                  <a:srgbClr val="333333"/>
+                </a:solidFill>
+                <a:latin typeface="Calibri"/>
+              </a:rPr>
+              <a:t>fixed-macros</a:t>
+            </a:r>
+            <a:r>
+              <a:rPr sz="2000" b="0">
+                <a:solidFill>
+                  <a:srgbClr val="333333"/>
+                </a:solidFill>
+                <a:latin typeface="Calibri"/>
+              </a:rPr>
+              <a:t> lab from the tools shelf</a:t>
+            </a:r>
+          </a:p>
+          <a:p>
+            <a:pPr lvl="0" marL="457200" indent="-228600">
+              <a:buFont typeface="Calibri"/>
+              <a:spcAft>
+                <a:spcPts val="1000"/>
+              </a:spcAft>
+              <a:buSzPct val="100000"/>
+              <a:buChar char="•"/>
+              <a:lnSpc>
+                <a:spcPts val="2200"/>
+              </a:lnSpc>
+            </a:pPr>
+            <a:r>
+              <a:rPr sz="2000" b="0">
+                <a:solidFill>
+                  <a:srgbClr val="333333"/>
+                </a:solidFill>
+                <a:latin typeface="Calibri"/>
+              </a:rPr>
+              <a:t>Open the interactive lab</a:t>
+            </a:r>
+          </a:p>
+          <a:p>
+            <a:pPr lvl="0" marL="457200" indent="-228600">
+              <a:buFont typeface="Calibri"/>
+              <a:spcAft>
+                <a:spcPts val="1000"/>
+              </a:spcAft>
+              <a:buSzPct val="100000"/>
+              <a:buChar char="•"/>
+              <a:lnSpc>
+                <a:spcPts val="2200"/>
+              </a:lnSpc>
+            </a:pPr>
+            <a:r>
+              <a:rPr sz="2000" b="0">
+                <a:solidFill>
+                  <a:srgbClr val="333333"/>
+                </a:solidFill>
+                <a:latin typeface="Calibri"/>
+              </a:rPr>
+              <a:t>Reveal golden is study-only</a:t>
+            </a:r>
+          </a:p>
+          <a:p>
+            <a:pPr lvl="0" marL="457200" indent="-228600">
+              <a:buFont typeface="Calibri"/>
+              <a:spcAft>
+                <a:spcPts val="1000"/>
+              </a:spcAft>
+              <a:buSzPct val="100000"/>
+              <a:buChar char="•"/>
+              <a:lnSpc>
+                <a:spcPts val="2200"/>
+              </a:lnSpc>
+            </a:pPr>
+            <a:r>
+              <a:rPr sz="2000" b="0">
+                <a:solidFill>
+                  <a:srgbClr val="333333"/>
+                </a:solidFill>
+                <a:latin typeface="Calibri"/>
+              </a:rPr>
+              <a:t>Work the challenges that lock the goldens</a:t>
+            </a:r>
+          </a:p>
+        </p:txBody>
+      </p:sp>
+      <p:sp>
+        <p:nvSpPr>
+          <p:cNvPr id="4" name="TextBox 3"/>
+          <p:cNvSpPr txBox="1"/>
+          <p:nvPr/>
+        </p:nvSpPr>
+        <p:spPr>
+          <a:xfrm>
+            <a:off x="548640" y="6355080"/>
+            <a:ext cx="11064240" cy="320040"/>
+          </a:xfrm>
+          <a:prstGeom prst="rect">
+            <a:avLst/>
+          </a:prstGeom>
+          <a:noFill/>
+        </p:spPr>
+        <p:txBody>
+          <a:bodyPr wrap="square">
+            <a:noAutofit/>
+          </a:bodyPr>
+          <a:lstStyle/>
+          <a:p>
+            <a:pPr algn="r">
+              <a:lnSpc>
+                <a:spcPts val="2200"/>
+              </a:lnSpc>
+              <a:defRPr sz="1000" b="0">
+                <a:solidFill>
+                  <a:srgbClr val="666666"/>
+                </a:solidFill>
+                <a:latin typeface="Calibri"/>
+              </a:defRPr>
+            </a:pPr>
+            <a:r>
+              <a:t>learn_legalization — 01 fixed macros</a:t>
+            </a:r>
+          </a:p>
+        </p:txBody>
+      </p:sp>
+    </p:spTree>
+  </p:cSld>
+  <p:clrMapOvr>
+    <a:masterClrMapping/>
+  </p:clrMapOvr>
+</p:sld>
+</file>
+
+<file path=ppt/slides/slide12.xml><?xml version="1.0" encoding="utf-8"?>
+<p:sld xmlns:a="http://schemas.openxmlformats.org/drawingml/2006/main" xmlns:p="http://schemas.openxmlformats.org/presentationml/2006/main" xmlns:r="http://schemas.openxmlformats.org/officeDocument/2006/relationships">
+  <p:cSld>
+    <p:spTree>
+      <p:nvGrpSpPr>
+        <p:cNvPr id="1" name=""/>
+        <p:cNvGrpSpPr/>
+        <p:nvPr/>
+      </p:nvGrpSpPr>
+      <p:grpSpPr/>
+      <p:sp>
+        <p:nvSpPr>
+          <p:cNvPr id="2" name="TextBox 1"/>
+          <p:cNvSpPr txBox="1"/>
+          <p:nvPr/>
+        </p:nvSpPr>
+        <p:spPr>
+          <a:xfrm>
+            <a:off x="548640" y="411480"/>
+            <a:ext cx="11064240" cy="777240"/>
+          </a:xfrm>
+          <a:prstGeom prst="rect">
+            <a:avLst/>
+          </a:prstGeom>
+          <a:noFill/>
+        </p:spPr>
+        <p:txBody>
+          <a:bodyPr wrap="square">
+            <a:noAutofit/>
+          </a:bodyPr>
+          <a:lstStyle/>
+          <a:p>
+            <a:pPr>
+              <a:lnSpc>
+                <a:spcPts val="2200"/>
+              </a:lnSpc>
+            </a:pPr>
+            <a:r>
+              <a:rPr sz="2800" b="1">
+                <a:solidFill>
+                  <a:srgbClr val="1A1A2E"/>
+                </a:solidFill>
+                <a:latin typeface="Calibri"/>
+              </a:rPr>
+              <a:t>Implement track</a:t>
+            </a:r>
+          </a:p>
+        </p:txBody>
+      </p:sp>
+      <p:sp>
+        <p:nvSpPr>
+          <p:cNvPr id="3" name="TextBox 2"/>
+          <p:cNvSpPr txBox="1"/>
+          <p:nvPr/>
+        </p:nvSpPr>
+        <p:spPr>
+          <a:xfrm>
+            <a:off x="548640" y="1234440"/>
+            <a:ext cx="11064240" cy="4937760"/>
+          </a:xfrm>
+          <a:prstGeom prst="rect">
+            <a:avLst/>
+          </a:prstGeom>
+          <a:noFill/>
+        </p:spPr>
+        <p:txBody>
+          <a:bodyPr wrap="square">
+            <a:noAutofit/>
+          </a:bodyPr>
+          <a:lstStyle/>
+          <a:p>
+            <a:pPr lvl="0" marL="457200" indent="-228600">
+              <a:buFont typeface="Calibri"/>
+              <a:spcAft>
+                <a:spcPts val="1000"/>
+              </a:spcAft>
+              <a:buSzPct val="100000"/>
+              <a:buChar char="•"/>
+              <a:lnSpc>
+                <a:spcPts val="2200"/>
+              </a:lnSpc>
+            </a:pPr>
+            <a:r>
+              <a:rPr sz="2000" b="0">
+                <a:solidFill>
+                  <a:srgbClr val="333333"/>
+                </a:solidFill>
+                <a:latin typeface="Calibri"/>
+              </a:rPr>
+              <a:t>In the implement track</a:t>
+            </a:r>
+          </a:p>
+          <a:p>
+            <a:pPr lvl="0" marL="457200" indent="-228600">
+              <a:buFont typeface="Calibri"/>
+              <a:spcAft>
+                <a:spcPts val="1000"/>
+              </a:spcAft>
+              <a:buSzPct val="100000"/>
+              <a:buChar char="•"/>
+              <a:lnSpc>
+                <a:spcPts val="2200"/>
+              </a:lnSpc>
+            </a:pPr>
+            <a:r>
+              <a:rPr sz="2000" b="0">
+                <a:solidFill>
+                  <a:srgbClr val="333333"/>
+                </a:solidFill>
+                <a:latin typeface="Calibri"/>
+              </a:rPr>
+              <a:t>Parse `tiny_legal.json`, run the algorithm with deterministic coordinates</a:t>
+            </a:r>
+          </a:p>
+          <a:p>
+            <a:pPr lvl="0" marL="457200" indent="-228600">
+              <a:buFont typeface="Calibri"/>
+              <a:spcAft>
+                <a:spcPts val="1000"/>
+              </a:spcAft>
+              <a:buSzPct val="100000"/>
+              <a:buChar char="•"/>
+              <a:lnSpc>
+                <a:spcPts val="2200"/>
+              </a:lnSpc>
+            </a:pPr>
+            <a:r>
+              <a:rPr sz="2000" b="0">
+                <a:solidFill>
+                  <a:srgbClr val="333333"/>
+                </a:solidFill>
+                <a:latin typeface="Calibri"/>
+              </a:rPr>
+              <a:t>Match the browser goldens before you claim the checklist</a:t>
+            </a:r>
+          </a:p>
+        </p:txBody>
+      </p:sp>
+      <p:sp>
+        <p:nvSpPr>
+          <p:cNvPr id="4" name="TextBox 3"/>
+          <p:cNvSpPr txBox="1"/>
+          <p:nvPr/>
+        </p:nvSpPr>
+        <p:spPr>
+          <a:xfrm>
+            <a:off x="548640" y="6355080"/>
+            <a:ext cx="11064240" cy="320040"/>
+          </a:xfrm>
+          <a:prstGeom prst="rect">
+            <a:avLst/>
+          </a:prstGeom>
+          <a:noFill/>
+        </p:spPr>
+        <p:txBody>
+          <a:bodyPr wrap="square">
+            <a:noAutofit/>
+          </a:bodyPr>
+          <a:lstStyle/>
+          <a:p>
+            <a:pPr algn="r">
+              <a:lnSpc>
+                <a:spcPts val="2200"/>
+              </a:lnSpc>
+              <a:defRPr sz="1000" b="0">
+                <a:solidFill>
+                  <a:srgbClr val="666666"/>
+                </a:solidFill>
+                <a:latin typeface="Calibri"/>
+              </a:defRPr>
+            </a:pPr>
+            <a:r>
+              <a:t>learn_legalization — 01 fixed macros</a:t>
+            </a:r>
+          </a:p>
+        </p:txBody>
+      </p:sp>
+    </p:spTree>
+  </p:cSld>
+  <p:clrMapOvr>
+    <a:masterClrMapping/>
+  </p:clrMapOvr>
+</p:sld>
+</file>
+
+<file path=ppt/slides/slide13.xml><?xml version="1.0" encoding="utf-8"?>
+<p:sld xmlns:a="http://schemas.openxmlformats.org/drawingml/2006/main" xmlns:p="http://schemas.openxmlformats.org/presentationml/2006/main" xmlns:r="http://schemas.openxmlformats.org/officeDocument/2006/relationships">
+  <p:cSld>
+    <p:spTree>
+      <p:nvGrpSpPr>
+        <p:cNvPr id="1" name=""/>
+        <p:cNvGrpSpPr/>
+        <p:nvPr/>
+      </p:nvGrpSpPr>
+      <p:grpSpPr/>
+      <p:sp>
+        <p:nvSpPr>
+          <p:cNvPr id="2" name="TextBox 1"/>
+          <p:cNvSpPr txBox="1"/>
+          <p:nvPr/>
+        </p:nvSpPr>
+        <p:spPr>
+          <a:xfrm>
+            <a:off x="548640" y="411480"/>
+            <a:ext cx="11064240" cy="777240"/>
+          </a:xfrm>
+          <a:prstGeom prst="rect">
+            <a:avLst/>
+          </a:prstGeom>
+          <a:noFill/>
+        </p:spPr>
+        <p:txBody>
+          <a:bodyPr wrap="square">
+            <a:noAutofit/>
+          </a:bodyPr>
+          <a:lstStyle/>
+          <a:p>
+            <a:pPr>
+              <a:lnSpc>
+                <a:spcPts val="2200"/>
+              </a:lnSpc>
+            </a:pPr>
+            <a:r>
+              <a:rPr sz="2800" b="1">
+                <a:solidFill>
+                  <a:srgbClr val="1A1A2E"/>
+                </a:solidFill>
+                <a:latin typeface="Calibri"/>
+              </a:rPr>
+              <a:t>Pitfalls</a:t>
+            </a:r>
+          </a:p>
+        </p:txBody>
+      </p:sp>
+      <p:sp>
+        <p:nvSpPr>
+          <p:cNvPr id="3" name="TextBox 2"/>
+          <p:cNvSpPr txBox="1"/>
+          <p:nvPr/>
+        </p:nvSpPr>
+        <p:spPr>
+          <a:xfrm>
+            <a:off x="548640" y="1234440"/>
+            <a:ext cx="11064240" cy="4937760"/>
+          </a:xfrm>
+          <a:prstGeom prst="rect">
+            <a:avLst/>
+          </a:prstGeom>
+          <a:noFill/>
+        </p:spPr>
+        <p:txBody>
+          <a:bodyPr wrap="square">
+            <a:noAutofit/>
+          </a:bodyPr>
+          <a:lstStyle/>
+          <a:p>
+            <a:pPr lvl="0" marL="457200" indent="-228600">
+              <a:buFont typeface="Calibri"/>
+              <a:spcAft>
+                <a:spcPts val="1000"/>
+              </a:spcAft>
+              <a:buSzPct val="100000"/>
+              <a:buChar char="•"/>
+              <a:lnSpc>
+                <a:spcPts val="2200"/>
+              </a:lnSpc>
+            </a:pPr>
+            <a:r>
+              <a:rPr sz="2000" b="0">
+                <a:solidFill>
+                  <a:srgbClr val="333333"/>
+                </a:solidFill>
+                <a:latin typeface="Calibri"/>
+              </a:rPr>
+              <a:t>Common traps</a:t>
+            </a:r>
+          </a:p>
+        </p:txBody>
+      </p:sp>
+      <p:sp>
+        <p:nvSpPr>
+          <p:cNvPr id="4" name="TextBox 3"/>
+          <p:cNvSpPr txBox="1"/>
+          <p:nvPr/>
+        </p:nvSpPr>
+        <p:spPr>
+          <a:xfrm>
+            <a:off x="548640" y="6355080"/>
+            <a:ext cx="11064240" cy="320040"/>
+          </a:xfrm>
+          <a:prstGeom prst="rect">
+            <a:avLst/>
+          </a:prstGeom>
+          <a:noFill/>
+        </p:spPr>
+        <p:txBody>
+          <a:bodyPr wrap="square">
+            <a:noAutofit/>
+          </a:bodyPr>
+          <a:lstStyle/>
+          <a:p>
+            <a:pPr algn="r">
+              <a:lnSpc>
+                <a:spcPts val="2200"/>
+              </a:lnSpc>
+              <a:defRPr sz="1000" b="0">
+                <a:solidFill>
+                  <a:srgbClr val="666666"/>
+                </a:solidFill>
+                <a:latin typeface="Calibri"/>
+              </a:defRPr>
+            </a:pPr>
+            <a:r>
+              <a:t>learn_legalization — 01 fixed macros</a:t>
+            </a:r>
+          </a:p>
+        </p:txBody>
+      </p:sp>
+    </p:spTree>
+  </p:cSld>
+  <p:clrMapOvr>
+    <a:masterClrMapping/>
+  </p:clrMapOvr>
+</p:sld>
+</file>
+
+<file path=ppt/slides/slide14.xml><?xml version="1.0" encoding="utf-8"?>
+<p:sld xmlns:a="http://schemas.openxmlformats.org/drawingml/2006/main" xmlns:p="http://schemas.openxmlformats.org/presentationml/2006/main" xmlns:r="http://schemas.openxmlformats.org/officeDocument/2006/relationships">
+  <p:cSld>
+    <p:spTree>
+      <p:nvGrpSpPr>
+        <p:cNvPr id="1" name=""/>
+        <p:cNvGrpSpPr/>
+        <p:nvPr/>
+      </p:nvGrpSpPr>
+      <p:grpSpPr/>
+      <p:sp>
+        <p:nvSpPr>
+          <p:cNvPr id="2" name="TextBox 1"/>
+          <p:cNvSpPr txBox="1"/>
+          <p:nvPr/>
+        </p:nvSpPr>
+        <p:spPr>
+          <a:xfrm>
+            <a:off x="548640" y="411480"/>
+            <a:ext cx="11064240" cy="777240"/>
+          </a:xfrm>
+          <a:prstGeom prst="rect">
+            <a:avLst/>
+          </a:prstGeom>
+          <a:noFill/>
+        </p:spPr>
+        <p:txBody>
+          <a:bodyPr wrap="square">
+            <a:noAutofit/>
+          </a:bodyPr>
+          <a:lstStyle/>
+          <a:p>
+            <a:pPr>
+              <a:lnSpc>
+                <a:spcPts val="2200"/>
+              </a:lnSpc>
+            </a:pPr>
+            <a:r>
+              <a:rPr sz="2800" b="1">
+                <a:solidFill>
+                  <a:srgbClr val="1A1A2E"/>
+                </a:solidFill>
+                <a:latin typeface="Calibri"/>
+              </a:rPr>
               <a:t>Your turn</a:t>
             </a:r>
           </a:p>
@@ -4800,6 +5506,125 @@
               <a:t>Movable cells must route around macro sites, not slide through them</a:t>
             </a:r>
           </a:p>
+        </p:txBody>
+      </p:sp>
+      <p:sp>
+        <p:nvSpPr>
+          <p:cNvPr id="4" name="TextBox 3"/>
+          <p:cNvSpPr txBox="1"/>
+          <p:nvPr/>
+        </p:nvSpPr>
+        <p:spPr>
+          <a:xfrm>
+            <a:off x="548640" y="6355080"/>
+            <a:ext cx="11064240" cy="320040"/>
+          </a:xfrm>
+          <a:prstGeom prst="rect">
+            <a:avLst/>
+          </a:prstGeom>
+          <a:noFill/>
+        </p:spPr>
+        <p:txBody>
+          <a:bodyPr wrap="square">
+            <a:noAutofit/>
+          </a:bodyPr>
+          <a:lstStyle/>
+          <a:p>
+            <a:pPr algn="r">
+              <a:lnSpc>
+                <a:spcPts val="2200"/>
+              </a:lnSpc>
+              <a:defRPr sz="1000" b="0">
+                <a:solidFill>
+                  <a:srgbClr val="666666"/>
+                </a:solidFill>
+                <a:latin typeface="Calibri"/>
+              </a:defRPr>
+            </a:pPr>
+            <a:r>
+              <a:t>learn_legalization — 01 fixed macros</a:t>
+            </a:r>
+          </a:p>
+        </p:txBody>
+      </p:sp>
+    </p:spTree>
+  </p:cSld>
+  <p:clrMapOvr>
+    <a:masterClrMapping/>
+  </p:clrMapOvr>
+</p:sld>
+</file>
+
+<file path=ppt/slides/slide3.xml><?xml version="1.0" encoding="utf-8"?>
+<p:sld xmlns:a="http://schemas.openxmlformats.org/drawingml/2006/main" xmlns:p="http://schemas.openxmlformats.org/presentationml/2006/main" xmlns:r="http://schemas.openxmlformats.org/officeDocument/2006/relationships">
+  <p:cSld>
+    <p:spTree>
+      <p:nvGrpSpPr>
+        <p:cNvPr id="1" name=""/>
+        <p:cNvGrpSpPr/>
+        <p:nvPr/>
+      </p:nvGrpSpPr>
+      <p:grpSpPr/>
+      <p:sp>
+        <p:nvSpPr>
+          <p:cNvPr id="2" name="TextBox 1"/>
+          <p:cNvSpPr txBox="1"/>
+          <p:nvPr/>
+        </p:nvSpPr>
+        <p:spPr>
+          <a:xfrm>
+            <a:off x="548640" y="411480"/>
+            <a:ext cx="11064240" cy="777240"/>
+          </a:xfrm>
+          <a:prstGeom prst="rect">
+            <a:avLst/>
+          </a:prstGeom>
+          <a:noFill/>
+        </p:spPr>
+        <p:txBody>
+          <a:bodyPr wrap="square">
+            <a:noAutofit/>
+          </a:bodyPr>
+          <a:lstStyle/>
+          <a:p>
+            <a:pPr>
+              <a:lnSpc>
+                <a:spcPts val="2200"/>
+              </a:lnSpc>
+            </a:pPr>
+            <a:r>
+              <a:rPr sz="2800" b="1">
+                <a:solidFill>
+                  <a:srgbClr val="1A1A2E"/>
+                </a:solidFill>
+                <a:latin typeface="Calibri"/>
+              </a:rPr>
+              <a:t>Pseudocode</a:t>
+            </a:r>
+          </a:p>
+        </p:txBody>
+      </p:sp>
+      <p:sp>
+        <p:nvSpPr>
+          <p:cNvPr id="3" name="TextBox 2"/>
+          <p:cNvSpPr txBox="1"/>
+          <p:nvPr/>
+        </p:nvSpPr>
+        <p:spPr>
+          <a:xfrm>
+            <a:off x="548640" y="1234440"/>
+            <a:ext cx="11064240" cy="4937760"/>
+          </a:xfrm>
+          <a:prstGeom prst="rect">
+            <a:avLst/>
+          </a:prstGeom>
+          <a:noFill/>
+        </p:spPr>
+        <p:txBody>
+          <a:bodyPr wrap="square">
+            <a:noAutofit/>
+          </a:bodyPr>
+          <a:lstStyle/>
           <a:p>
             <a:pPr lvl="0" marL="457200" indent="-228600">
               <a:buFont typeface="Calibri"/>
@@ -4819,7 +5644,73 @@
                 </a:solidFill>
                 <a:latin typeface="Calibri"/>
               </a:rPr>
-              <a:t>&lt;!-- algorithm-walkthrough --&gt;</a:t>
+              <a:t>Macro legalization adds one precondition to the Abacus sketch: place locked cells first</a:t>
+            </a:r>
+          </a:p>
+          <a:p>
+            <a:pPr lvl="0" marL="457200" indent="-228600">
+              <a:buFont typeface="Calibri"/>
+              <a:spcAft>
+                <a:spcPts val="1000"/>
+              </a:spcAft>
+              <a:buSzPct val="100000"/>
+              <a:buChar char="•"/>
+              <a:lnSpc>
+                <a:spcPts val="2200"/>
+              </a:lnSpc>
+            </a:pPr>
+            <a:r>
+              <a:rPr sz="2000" b="0">
+                <a:solidFill>
+                  <a:srgbClr val="333333"/>
+                </a:solidFill>
+                <a:latin typeface="Calibri"/>
+              </a:rPr>
+              <a:t>Their site intervals become obstacles for every later try-place on that row</a:t>
+            </a:r>
+          </a:p>
+          <a:p>
+            <a:pPr lvl="0" marL="457200" indent="-228600">
+              <a:buFont typeface="Calibri"/>
+              <a:spcAft>
+                <a:spcPts val="1000"/>
+              </a:spcAft>
+              <a:buSzPct val="100000"/>
+              <a:buChar char="•"/>
+              <a:lnSpc>
+                <a:spcPts val="2200"/>
+              </a:lnSpc>
+            </a:pPr>
+            <a:r>
+              <a:rPr sz="2000" b="0">
+                <a:solidFill>
+                  <a:srgbClr val="333333"/>
+                </a:solidFill>
+                <a:latin typeface="Calibri"/>
+              </a:rPr>
+              <a:t>Open this module's examples file and find the Pseudocode section</a:t>
+            </a:r>
+          </a:p>
+          <a:p>
+            <a:pPr lvl="0" marL="457200" indent="-228600">
+              <a:buFont typeface="Calibri"/>
+              <a:spcAft>
+                <a:spcPts val="1000"/>
+              </a:spcAft>
+              <a:buSzPct val="100000"/>
+              <a:buChar char="•"/>
+              <a:lnSpc>
+                <a:spcPts val="2200"/>
+              </a:lnSpc>
+            </a:pPr>
+            <a:r>
+              <a:rPr sz="2000" b="0">
+                <a:solidFill>
+                  <a:srgbClr val="333333"/>
+                </a:solidFill>
+                <a:latin typeface="Calibri"/>
+              </a:rPr>
+              <a:t>That written sketch is what you implement on the implement track and what the browser</a:t>
             </a:r>
           </a:p>
         </p:txBody>
@@ -4871,7 +5762,424 @@
 </p:sld>
 </file>
 
-<file path=ppt/slides/slide3.xml><?xml version="1.0" encoding="utf-8"?>
+<file path=ppt/slides/slide4.xml><?xml version="1.0" encoding="utf-8"?>
+<p:sld xmlns:a="http://schemas.openxmlformats.org/drawingml/2006/main" xmlns:p="http://schemas.openxmlformats.org/presentationml/2006/main" xmlns:r="http://schemas.openxmlformats.org/officeDocument/2006/relationships">
+  <p:cSld>
+    <p:spTree>
+      <p:nvGrpSpPr>
+        <p:cNvPr id="1" name=""/>
+        <p:cNvGrpSpPr/>
+        <p:nvPr/>
+      </p:nvGrpSpPr>
+      <p:grpSpPr/>
+      <p:sp>
+        <p:nvSpPr>
+          <p:cNvPr id="2" name="TextBox 1"/>
+          <p:cNvSpPr txBox="1"/>
+          <p:nvPr/>
+        </p:nvSpPr>
+        <p:spPr>
+          <a:xfrm>
+            <a:off x="548640" y="411480"/>
+            <a:ext cx="11064240" cy="777240"/>
+          </a:xfrm>
+          <a:prstGeom prst="rect">
+            <a:avLst/>
+          </a:prstGeom>
+          <a:noFill/>
+        </p:spPr>
+        <p:txBody>
+          <a:bodyPr wrap="square">
+            <a:noAutofit/>
+          </a:bodyPr>
+          <a:lstStyle/>
+          <a:p>
+            <a:pPr>
+              <a:lnSpc>
+                <a:spcPts val="2200"/>
+              </a:lnSpc>
+            </a:pPr>
+            <a:r>
+              <a:rPr sz="2800" b="1">
+                <a:solidFill>
+                  <a:srgbClr val="1A1A2E"/>
+                </a:solidFill>
+                <a:latin typeface="Calibri"/>
+              </a:rPr>
+              <a:t>Algorithm sketch</a:t>
+            </a:r>
+          </a:p>
+        </p:txBody>
+      </p:sp>
+      <p:sp>
+        <p:nvSpPr>
+          <p:cNvPr id="3" name="TextBox 2"/>
+          <p:cNvSpPr txBox="1"/>
+          <p:nvPr/>
+        </p:nvSpPr>
+        <p:spPr>
+          <a:xfrm>
+            <a:off x="548640" y="1234440"/>
+            <a:ext cx="11064240" cy="4937760"/>
+          </a:xfrm>
+          <a:prstGeom prst="rect">
+            <a:avLst/>
+          </a:prstGeom>
+          <a:noFill/>
+        </p:spPr>
+        <p:txBody>
+          <a:bodyPr wrap="square">
+            <a:noAutofit/>
+          </a:bodyPr>
+          <a:lstStyle/>
+          <a:p>
+            <a:pPr lvl="0" marL="457200" indent="-228600">
+              <a:buFont typeface="Calibri"/>
+              <a:spcAft>
+                <a:spcPts val="1000"/>
+              </a:spcAft>
+              <a:buSzPct val="100000"/>
+              <a:buChar char="•"/>
+              <a:lnSpc>
+                <a:spcPts val="2200"/>
+              </a:lnSpc>
+            </a:pPr>
+            <a:r>
+              <a:rPr sz="2000" b="0">
+                <a:solidFill>
+                  <a:srgbClr val="333333"/>
+                </a:solidFill>
+                <a:latin typeface="Calibri"/>
+              </a:rPr>
+              <a:t>The legality line in the sketch is new too</a:t>
+            </a:r>
+          </a:p>
+          <a:p>
+            <a:pPr lvl="0" marL="457200" indent="-228600">
+              <a:buFont typeface="Calibri"/>
+              <a:spcAft>
+                <a:spcPts val="1000"/>
+              </a:spcAft>
+              <a:buSzPct val="100000"/>
+              <a:buChar char="•"/>
+              <a:lnSpc>
+                <a:spcPts val="2200"/>
+              </a:lnSpc>
+            </a:pPr>
+            <a:r>
+              <a:rPr sz="2000" b="0">
+                <a:solidFill>
+                  <a:srgbClr val="333333"/>
+                </a:solidFill>
+                <a:latin typeface="Calibri"/>
+              </a:rPr>
+              <a:t>On this instance Abacus still finishes legal with displacement four</a:t>
+            </a:r>
+          </a:p>
+        </p:txBody>
+      </p:sp>
+      <p:sp>
+        <p:nvSpPr>
+          <p:cNvPr id="4" name="TextBox 3"/>
+          <p:cNvSpPr txBox="1"/>
+          <p:nvPr/>
+        </p:nvSpPr>
+        <p:spPr>
+          <a:xfrm>
+            <a:off x="548640" y="6355080"/>
+            <a:ext cx="11064240" cy="320040"/>
+          </a:xfrm>
+          <a:prstGeom prst="rect">
+            <a:avLst/>
+          </a:prstGeom>
+          <a:noFill/>
+        </p:spPr>
+        <p:txBody>
+          <a:bodyPr wrap="square">
+            <a:noAutofit/>
+          </a:bodyPr>
+          <a:lstStyle/>
+          <a:p>
+            <a:pPr algn="r">
+              <a:lnSpc>
+                <a:spcPts val="2200"/>
+              </a:lnSpc>
+              <a:defRPr sz="1000" b="0">
+                <a:solidFill>
+                  <a:srgbClr val="666666"/>
+                </a:solidFill>
+                <a:latin typeface="Calibri"/>
+              </a:defRPr>
+            </a:pPr>
+            <a:r>
+              <a:t>learn_legalization — 01 fixed macros</a:t>
+            </a:r>
+          </a:p>
+        </p:txBody>
+      </p:sp>
+    </p:spTree>
+  </p:cSld>
+  <p:clrMapOvr>
+    <a:masterClrMapping/>
+  </p:clrMapOvr>
+</p:sld>
+</file>
+
+<file path=ppt/slides/slide5.xml><?xml version="1.0" encoding="utf-8"?>
+<p:sld xmlns:a="http://schemas.openxmlformats.org/drawingml/2006/main" xmlns:p="http://schemas.openxmlformats.org/presentationml/2006/main" xmlns:r="http://schemas.openxmlformats.org/officeDocument/2006/relationships">
+  <p:cSld>
+    <p:spTree>
+      <p:nvGrpSpPr>
+        <p:cNvPr id="1" name=""/>
+        <p:cNvGrpSpPr/>
+        <p:nvPr/>
+      </p:nvGrpSpPr>
+      <p:grpSpPr/>
+      <p:sp>
+        <p:nvSpPr>
+          <p:cNvPr id="2" name="TextBox 1"/>
+          <p:cNvSpPr txBox="1"/>
+          <p:nvPr/>
+        </p:nvSpPr>
+        <p:spPr>
+          <a:xfrm>
+            <a:off x="548640" y="411480"/>
+            <a:ext cx="11064240" cy="777240"/>
+          </a:xfrm>
+          <a:prstGeom prst="rect">
+            <a:avLst/>
+          </a:prstGeom>
+          <a:noFill/>
+        </p:spPr>
+        <p:txBody>
+          <a:bodyPr wrap="square">
+            <a:noAutofit/>
+          </a:bodyPr>
+          <a:lstStyle/>
+          <a:p>
+            <a:pPr>
+              <a:lnSpc>
+                <a:spcPts val="2200"/>
+              </a:lnSpc>
+            </a:pPr>
+            <a:r>
+              <a:rPr sz="2800" b="1">
+                <a:solidFill>
+                  <a:srgbClr val="1A1A2E"/>
+                </a:solidFill>
+                <a:latin typeface="Calibri"/>
+              </a:rPr>
+              <a:t>Algorithm sketch — try these</a:t>
+            </a:r>
+          </a:p>
+        </p:txBody>
+      </p:sp>
+      <p:sp>
+        <p:nvSpPr>
+          <p:cNvPr id="3" name="TextBox 2"/>
+          <p:cNvSpPr txBox="1"/>
+          <p:nvPr/>
+        </p:nvSpPr>
+        <p:spPr>
+          <a:xfrm>
+            <a:off x="548640" y="1143000"/>
+            <a:ext cx="11064240" cy="5029200"/>
+          </a:xfrm>
+          <a:prstGeom prst="rect">
+            <a:avLst/>
+          </a:prstGeom>
+          <a:solidFill>
+            <a:srgbClr val="F4F4F4"/>
+          </a:solidFill>
+        </p:spPr>
+        <p:txBody>
+          <a:bodyPr wrap="square">
+            <a:noAutofit/>
+          </a:bodyPr>
+          <a:lstStyle/>
+          <a:p>
+            <a:pPr>
+              <a:lnSpc>
+                <a:spcPts val="2200"/>
+              </a:lnSpc>
+              <a:spcAft>
+                <a:spcPts val="400"/>
+              </a:spcAft>
+            </a:pPr>
+            <a:r>
+              <a:rPr sz="2000" b="0">
+                <a:solidFill>
+                  <a:srgbClr val="333333"/>
+                </a:solidFill>
+                <a:latin typeface="Consolas"/>
+              </a:rPr>
+              <a:t>INPUT: positions, widths, fixed F (e.g. D@(8,4))</a:t>
+            </a:r>
+          </a:p>
+          <a:p>
+            <a:pPr>
+              <a:lnSpc>
+                <a:spcPts val="2200"/>
+              </a:lnSpc>
+              <a:spcAft>
+                <a:spcPts val="400"/>
+              </a:spcAft>
+            </a:pPr>
+            <a:r>
+              <a:rPr sz="2000" b="0">
+                <a:solidFill>
+                  <a:srgbClr val="333333"/>
+                </a:solidFill>
+                <a:latin typeface="Consolas"/>
+              </a:rPr>
+              <a:t>OUTPUT: legal pack; macros never move</a:t>
+            </a:r>
+          </a:p>
+          <a:p>
+            <a:pPr>
+              <a:lnSpc>
+                <a:spcPts val="2200"/>
+              </a:lnSpc>
+              <a:spcAft>
+                <a:spcPts val="400"/>
+              </a:spcAft>
+            </a:pPr>
+            <a:r>
+              <a:rPr sz="2000" b="0">
+                <a:solidFill>
+                  <a:srgbClr val="333333"/>
+                </a:solidFill>
+                <a:latin typeface="Consolas"/>
+              </a:rPr>
+              <a:t>place every f in F at locked (x,y)</a:t>
+            </a:r>
+          </a:p>
+          <a:p>
+            <a:pPr>
+              <a:lnSpc>
+                <a:spcPts val="2200"/>
+              </a:lnSpc>
+              <a:spcAft>
+                <a:spcPts val="400"/>
+              </a:spcAft>
+            </a:pPr>
+            <a:r>
+              <a:rPr sz="2000" b="0">
+                <a:solidFill>
+                  <a:srgbClr val="333333"/>
+                </a:solidFill>
+                <a:latin typeface="Consolas"/>
+              </a:rPr>
+              <a:t>run Abacus/Tetris on movables only</a:t>
+            </a:r>
+          </a:p>
+          <a:p>
+            <a:pPr>
+              <a:lnSpc>
+                <a:spcPts val="2200"/>
+              </a:lnSpc>
+              <a:spcAft>
+                <a:spcPts val="400"/>
+              </a:spcAft>
+            </a:pPr>
+            <a:r>
+              <a:rPr sz="2000" b="0">
+                <a:solidFill>
+                  <a:srgbClr val="333333"/>
+                </a:solidFill>
+                <a:latin typeface="Consolas"/>
+              </a:rPr>
+              <a:t>F intervals block try-place / left-pack</a:t>
+            </a:r>
+          </a:p>
+          <a:p>
+            <a:pPr>
+              <a:lnSpc>
+                <a:spcPts val="2200"/>
+              </a:lnSpc>
+              <a:spcAft>
+                <a:spcPts val="400"/>
+              </a:spcAft>
+            </a:pPr>
+            <a:r>
+              <a:rPr sz="2000" b="0">
+                <a:solidFill>
+                  <a:srgbClr val="333333"/>
+                </a:solidFill>
+                <a:latin typeface="Consolas"/>
+              </a:rPr>
+              <a:t>fail legality if any macro drifted</a:t>
+            </a:r>
+          </a:p>
+          <a:p>
+            <a:pPr>
+              <a:lnSpc>
+                <a:spcPts val="2200"/>
+              </a:lnSpc>
+              <a:spcAft>
+                <a:spcPts val="400"/>
+              </a:spcAft>
+            </a:pPr>
+            <a:r>
+              <a:rPr sz="2000" b="0">
+                <a:solidFill>
+                  <a:srgbClr val="333333"/>
+                </a:solidFill>
+                <a:latin typeface="Consolas"/>
+              </a:rPr>
+              <a:t>GOLDEN: D stays (8,4); Abacus disp=4; legal</a:t>
+            </a:r>
+          </a:p>
+        </p:txBody>
+      </p:sp>
+      <p:sp>
+        <p:nvSpPr>
+          <p:cNvPr id="4" name="TextBox 3"/>
+          <p:cNvSpPr txBox="1"/>
+          <p:nvPr/>
+        </p:nvSpPr>
+        <p:spPr>
+          <a:xfrm>
+            <a:off x="548640" y="6355080"/>
+            <a:ext cx="11064240" cy="320040"/>
+          </a:xfrm>
+          <a:prstGeom prst="rect">
+            <a:avLst/>
+          </a:prstGeom>
+          <a:noFill/>
+        </p:spPr>
+        <p:txBody>
+          <a:bodyPr wrap="square">
+            <a:noAutofit/>
+          </a:bodyPr>
+          <a:lstStyle/>
+          <a:p>
+            <a:pPr algn="r">
+              <a:lnSpc>
+                <a:spcPts val="2200"/>
+              </a:lnSpc>
+              <a:defRPr sz="1000" b="0">
+                <a:solidFill>
+                  <a:srgbClr val="666666"/>
+                </a:solidFill>
+                <a:latin typeface="Calibri"/>
+              </a:defRPr>
+            </a:pPr>
+            <a:r>
+              <a:t>learn_legalization — 01 fixed macros</a:t>
+            </a:r>
+          </a:p>
+        </p:txBody>
+      </p:sp>
+    </p:spTree>
+  </p:cSld>
+  <p:clrMapOvr>
+    <a:masterClrMapping/>
+  </p:clrMapOvr>
+</p:sld>
+</file>
+
+<file path=ppt/slides/slide6.xml><?xml version="1.0" encoding="utf-8"?>
 <p:sld xmlns:a="http://schemas.openxmlformats.org/drawingml/2006/main" xmlns:p="http://schemas.openxmlformats.org/presentationml/2006/main" xmlns:r="http://schemas.openxmlformats.org/officeDocument/2006/relationships">
   <p:cSld>
     <p:spTree>
@@ -5030,7 +6338,7 @@
 </p:sld>
 </file>
 
-<file path=ppt/slides/slide4.xml><?xml version="1.0" encoding="utf-8"?>
+<file path=ppt/slides/slide7.xml><?xml version="1.0" encoding="utf-8"?>
 <p:sld xmlns:a="http://schemas.openxmlformats.org/drawingml/2006/main" xmlns:p="http://schemas.openxmlformats.org/presentationml/2006/main" xmlns:r="http://schemas.openxmlformats.org/officeDocument/2006/relationships">
   <p:cSld>
     <p:spTree>
@@ -5189,7 +6497,7 @@
 </p:sld>
 </file>
 
-<file path=ppt/slides/slide5.xml><?xml version="1.0" encoding="utf-8"?>
+<file path=ppt/slides/slide8.xml><?xml version="1.0" encoding="utf-8"?>
 <p:sld xmlns:a="http://schemas.openxmlformats.org/drawingml/2006/main" xmlns:p="http://schemas.openxmlformats.org/presentationml/2006/main" xmlns:r="http://schemas.openxmlformats.org/officeDocument/2006/relationships">
   <p:cSld>
     <p:spTree>
@@ -5348,7 +6656,7 @@
 </p:sld>
 </file>
 
-<file path=ppt/slides/slide6.xml><?xml version="1.0" encoding="utf-8"?>
+<file path=ppt/slides/slide9.xml><?xml version="1.0" encoding="utf-8"?>
 <p:sld xmlns:a="http://schemas.openxmlformats.org/drawingml/2006/main" xmlns:p="http://schemas.openxmlformats.org/presentationml/2006/main" xmlns:r="http://schemas.openxmlformats.org/officeDocument/2006/relationships">
   <p:cSld>
     <p:spTree>
@@ -5463,553 +6771,6 @@
       <p:sp>
         <p:nvSpPr>
           <p:cNvPr id="5" name="TextBox 4"/>
-          <p:cNvSpPr txBox="1"/>
-          <p:nvPr/>
-        </p:nvSpPr>
-        <p:spPr>
-          <a:xfrm>
-            <a:off x="548640" y="6355080"/>
-            <a:ext cx="11064240" cy="320040"/>
-          </a:xfrm>
-          <a:prstGeom prst="rect">
-            <a:avLst/>
-          </a:prstGeom>
-          <a:noFill/>
-        </p:spPr>
-        <p:txBody>
-          <a:bodyPr wrap="square">
-            <a:noAutofit/>
-          </a:bodyPr>
-          <a:lstStyle/>
-          <a:p>
-            <a:pPr algn="r">
-              <a:lnSpc>
-                <a:spcPts val="2200"/>
-              </a:lnSpc>
-              <a:defRPr sz="1000" b="0">
-                <a:solidFill>
-                  <a:srgbClr val="666666"/>
-                </a:solidFill>
-                <a:latin typeface="Calibri"/>
-              </a:defRPr>
-            </a:pPr>
-            <a:r>
-              <a:t>learn_legalization — 01 fixed macros</a:t>
-            </a:r>
-          </a:p>
-        </p:txBody>
-      </p:sp>
-    </p:spTree>
-  </p:cSld>
-  <p:clrMapOvr>
-    <a:masterClrMapping/>
-  </p:clrMapOvr>
-</p:sld>
-</file>
-
-<file path=ppt/slides/slide7.xml><?xml version="1.0" encoding="utf-8"?>
-<p:sld xmlns:a="http://schemas.openxmlformats.org/drawingml/2006/main" xmlns:p="http://schemas.openxmlformats.org/presentationml/2006/main" xmlns:r="http://schemas.openxmlformats.org/officeDocument/2006/relationships">
-  <p:cSld>
-    <p:spTree>
-      <p:nvGrpSpPr>
-        <p:cNvPr id="1" name=""/>
-        <p:cNvGrpSpPr/>
-        <p:nvPr/>
-      </p:nvGrpSpPr>
-      <p:grpSpPr/>
-      <p:sp>
-        <p:nvSpPr>
-          <p:cNvPr id="2" name="TextBox 1"/>
-          <p:cNvSpPr txBox="1"/>
-          <p:nvPr/>
-        </p:nvSpPr>
-        <p:spPr>
-          <a:xfrm>
-            <a:off x="548640" y="411480"/>
-            <a:ext cx="11064240" cy="777240"/>
-          </a:xfrm>
-          <a:prstGeom prst="rect">
-            <a:avLst/>
-          </a:prstGeom>
-          <a:noFill/>
-        </p:spPr>
-        <p:txBody>
-          <a:bodyPr wrap="square">
-            <a:noAutofit/>
-          </a:bodyPr>
-          <a:lstStyle/>
-          <a:p>
-            <a:pPr>
-              <a:lnSpc>
-                <a:spcPts val="2200"/>
-              </a:lnSpc>
-            </a:pPr>
-            <a:r>
-              <a:rPr sz="2800" b="1">
-                <a:solidFill>
-                  <a:srgbClr val="1A1A2E"/>
-                </a:solidFill>
-                <a:latin typeface="Calibri"/>
-              </a:rPr>
-              <a:t>Movables avoid macro sites</a:t>
-            </a:r>
-          </a:p>
-        </p:txBody>
-      </p:sp>
-      <p:pic>
-        <p:nvPicPr>
-          <p:cNvPr id="3" name="Picture 2" descr="05-avoid-macro.png"/>
-          <p:cNvPicPr>
-            <a:picLocks noChangeAspect="1"/>
-          </p:cNvPicPr>
-          <p:nvPr/>
-        </p:nvPicPr>
-        <p:blipFill>
-          <a:blip r:embed="rId2"/>
-          <a:stretch>
-            <a:fillRect/>
-          </a:stretch>
-        </p:blipFill>
-        <p:spPr>
-          <a:xfrm>
-            <a:off x="548640" y="1143000"/>
-            <a:ext cx="9404113" cy="4572000"/>
-          </a:xfrm>
-          <a:prstGeom prst="rect">
-            <a:avLst/>
-          </a:prstGeom>
-        </p:spPr>
-      </p:pic>
-      <p:sp>
-        <p:nvSpPr>
-          <p:cNvPr id="4" name="TextBox 3"/>
-          <p:cNvSpPr txBox="1"/>
-          <p:nvPr/>
-        </p:nvSpPr>
-        <p:spPr>
-          <a:xfrm>
-            <a:off x="548640" y="5897880"/>
-            <a:ext cx="11064240" cy="411480"/>
-          </a:xfrm>
-          <a:prstGeom prst="rect">
-            <a:avLst/>
-          </a:prstGeom>
-          <a:noFill/>
-        </p:spPr>
-        <p:txBody>
-          <a:bodyPr wrap="square">
-            <a:noAutofit/>
-          </a:bodyPr>
-          <a:lstStyle/>
-          <a:p>
-            <a:pPr>
-              <a:lnSpc>
-                <a:spcPts val="2200"/>
-              </a:lnSpc>
-            </a:pPr>
-            <a:r>
-              <a:rPr sz="1200" b="0">
-                <a:solidFill>
-                  <a:srgbClr val="333333"/>
-                </a:solidFill>
-                <a:latin typeface="Calibri"/>
-              </a:rPr>
-              <a:t>Movables avoid macro sites</a:t>
-            </a:r>
-          </a:p>
-        </p:txBody>
-      </p:sp>
-      <p:sp>
-        <p:nvSpPr>
-          <p:cNvPr id="5" name="TextBox 4"/>
-          <p:cNvSpPr txBox="1"/>
-          <p:nvPr/>
-        </p:nvSpPr>
-        <p:spPr>
-          <a:xfrm>
-            <a:off x="548640" y="6355080"/>
-            <a:ext cx="11064240" cy="320040"/>
-          </a:xfrm>
-          <a:prstGeom prst="rect">
-            <a:avLst/>
-          </a:prstGeom>
-          <a:noFill/>
-        </p:spPr>
-        <p:txBody>
-          <a:bodyPr wrap="square">
-            <a:noAutofit/>
-          </a:bodyPr>
-          <a:lstStyle/>
-          <a:p>
-            <a:pPr algn="r">
-              <a:lnSpc>
-                <a:spcPts val="2200"/>
-              </a:lnSpc>
-              <a:defRPr sz="1000" b="0">
-                <a:solidFill>
-                  <a:srgbClr val="666666"/>
-                </a:solidFill>
-                <a:latin typeface="Calibri"/>
-              </a:defRPr>
-            </a:pPr>
-            <a:r>
-              <a:t>learn_legalization — 01 fixed macros</a:t>
-            </a:r>
-          </a:p>
-        </p:txBody>
-      </p:sp>
-    </p:spTree>
-  </p:cSld>
-  <p:clrMapOvr>
-    <a:masterClrMapping/>
-  </p:clrMapOvr>
-</p:sld>
-</file>
-
-<file path=ppt/slides/slide8.xml><?xml version="1.0" encoding="utf-8"?>
-<p:sld xmlns:a="http://schemas.openxmlformats.org/drawingml/2006/main" xmlns:p="http://schemas.openxmlformats.org/presentationml/2006/main" xmlns:r="http://schemas.openxmlformats.org/officeDocument/2006/relationships">
-  <p:cSld>
-    <p:spTree>
-      <p:nvGrpSpPr>
-        <p:cNvPr id="1" name=""/>
-        <p:cNvGrpSpPr/>
-        <p:nvPr/>
-      </p:nvGrpSpPr>
-      <p:grpSpPr/>
-      <p:sp>
-        <p:nvSpPr>
-          <p:cNvPr id="2" name="TextBox 1"/>
-          <p:cNvSpPr txBox="1"/>
-          <p:nvPr/>
-        </p:nvSpPr>
-        <p:spPr>
-          <a:xfrm>
-            <a:off x="548640" y="411480"/>
-            <a:ext cx="11064240" cy="777240"/>
-          </a:xfrm>
-          <a:prstGeom prst="rect">
-            <a:avLst/>
-          </a:prstGeom>
-          <a:noFill/>
-        </p:spPr>
-        <p:txBody>
-          <a:bodyPr wrap="square">
-            <a:noAutofit/>
-          </a:bodyPr>
-          <a:lstStyle/>
-          <a:p>
-            <a:pPr>
-              <a:lnSpc>
-                <a:spcPts val="2200"/>
-              </a:lnSpc>
-            </a:pPr>
-            <a:r>
-              <a:rPr sz="2800" b="1">
-                <a:solidFill>
-                  <a:srgbClr val="1A1A2E"/>
-                </a:solidFill>
-                <a:latin typeface="Calibri"/>
-              </a:rPr>
-              <a:t>Browser lab track</a:t>
-            </a:r>
-          </a:p>
-        </p:txBody>
-      </p:sp>
-      <p:sp>
-        <p:nvSpPr>
-          <p:cNvPr id="3" name="TextBox 2"/>
-          <p:cNvSpPr txBox="1"/>
-          <p:nvPr/>
-        </p:nvSpPr>
-        <p:spPr>
-          <a:xfrm>
-            <a:off x="548640" y="1234440"/>
-            <a:ext cx="11064240" cy="4937760"/>
-          </a:xfrm>
-          <a:prstGeom prst="rect">
-            <a:avLst/>
-          </a:prstGeom>
-          <a:noFill/>
-        </p:spPr>
-        <p:txBody>
-          <a:bodyPr wrap="square">
-            <a:noAutofit/>
-          </a:bodyPr>
-          <a:lstStyle/>
-          <a:p>
-            <a:pPr lvl="0" marL="457200" indent="-228600">
-              <a:buFont typeface="Calibri"/>
-              <a:spcAft>
-                <a:spcPts val="1000"/>
-              </a:spcAft>
-              <a:buSzPct val="100000"/>
-              <a:buChar char="•"/>
-              <a:lnSpc>
-                <a:spcPts val="2200"/>
-              </a:lnSpc>
-            </a:pPr>
-            <a:r>
-              <a:rPr sz="2000" b="0">
-                <a:solidFill>
-                  <a:srgbClr val="333333"/>
-                </a:solidFill>
-                <a:latin typeface="Calibri"/>
-              </a:rPr>
-              <a:t>In the browser lab track, open the </a:t>
-            </a:r>
-            <a:r>
-              <a:rPr sz="2000" b="1">
-                <a:solidFill>
-                  <a:srgbClr val="333333"/>
-                </a:solidFill>
-                <a:latin typeface="Calibri"/>
-              </a:rPr>
-              <a:t>fixed-macros</a:t>
-            </a:r>
-            <a:r>
-              <a:rPr sz="2000" b="0">
-                <a:solidFill>
-                  <a:srgbClr val="333333"/>
-                </a:solidFill>
-                <a:latin typeface="Calibri"/>
-              </a:rPr>
-              <a:t> lab from the tools shelf</a:t>
-            </a:r>
-          </a:p>
-          <a:p>
-            <a:pPr lvl="0" marL="457200" indent="-228600">
-              <a:buFont typeface="Calibri"/>
-              <a:spcAft>
-                <a:spcPts val="1000"/>
-              </a:spcAft>
-              <a:buSzPct val="100000"/>
-              <a:buChar char="•"/>
-              <a:lnSpc>
-                <a:spcPts val="2200"/>
-              </a:lnSpc>
-            </a:pPr>
-            <a:r>
-              <a:rPr sz="2000" b="0">
-                <a:solidFill>
-                  <a:srgbClr val="333333"/>
-                </a:solidFill>
-                <a:latin typeface="Calibri"/>
-              </a:rPr>
-              <a:t>Load the overlap or float starter, run the legalizer once</a:t>
-            </a:r>
-          </a:p>
-          <a:p>
-            <a:pPr lvl="0" marL="457200" indent="-228600">
-              <a:buFont typeface="Calibri"/>
-              <a:spcAft>
-                <a:spcPts val="1000"/>
-              </a:spcAft>
-              <a:buSzPct val="100000"/>
-              <a:buChar char="•"/>
-              <a:lnSpc>
-                <a:spcPts val="2200"/>
-              </a:lnSpc>
-            </a:pPr>
-            <a:r>
-              <a:rPr sz="2000" b="0">
-                <a:solidFill>
-                  <a:srgbClr val="333333"/>
-                </a:solidFill>
-                <a:latin typeface="Calibri"/>
-              </a:rPr>
-              <a:t>Work the challenges that lock the goldens</a:t>
-            </a:r>
-          </a:p>
-        </p:txBody>
-      </p:sp>
-      <p:sp>
-        <p:nvSpPr>
-          <p:cNvPr id="4" name="TextBox 3"/>
-          <p:cNvSpPr txBox="1"/>
-          <p:nvPr/>
-        </p:nvSpPr>
-        <p:spPr>
-          <a:xfrm>
-            <a:off x="548640" y="6355080"/>
-            <a:ext cx="11064240" cy="320040"/>
-          </a:xfrm>
-          <a:prstGeom prst="rect">
-            <a:avLst/>
-          </a:prstGeom>
-          <a:noFill/>
-        </p:spPr>
-        <p:txBody>
-          <a:bodyPr wrap="square">
-            <a:noAutofit/>
-          </a:bodyPr>
-          <a:lstStyle/>
-          <a:p>
-            <a:pPr algn="r">
-              <a:lnSpc>
-                <a:spcPts val="2200"/>
-              </a:lnSpc>
-              <a:defRPr sz="1000" b="0">
-                <a:solidFill>
-                  <a:srgbClr val="666666"/>
-                </a:solidFill>
-                <a:latin typeface="Calibri"/>
-              </a:defRPr>
-            </a:pPr>
-            <a:r>
-              <a:t>learn_legalization — 01 fixed macros</a:t>
-            </a:r>
-          </a:p>
-        </p:txBody>
-      </p:sp>
-    </p:spTree>
-  </p:cSld>
-  <p:clrMapOvr>
-    <a:masterClrMapping/>
-  </p:clrMapOvr>
-</p:sld>
-</file>
-
-<file path=ppt/slides/slide9.xml><?xml version="1.0" encoding="utf-8"?>
-<p:sld xmlns:a="http://schemas.openxmlformats.org/drawingml/2006/main" xmlns:p="http://schemas.openxmlformats.org/presentationml/2006/main" xmlns:r="http://schemas.openxmlformats.org/officeDocument/2006/relationships">
-  <p:cSld>
-    <p:spTree>
-      <p:nvGrpSpPr>
-        <p:cNvPr id="1" name=""/>
-        <p:cNvGrpSpPr/>
-        <p:nvPr/>
-      </p:nvGrpSpPr>
-      <p:grpSpPr/>
-      <p:sp>
-        <p:nvSpPr>
-          <p:cNvPr id="2" name="TextBox 1"/>
-          <p:cNvSpPr txBox="1"/>
-          <p:nvPr/>
-        </p:nvSpPr>
-        <p:spPr>
-          <a:xfrm>
-            <a:off x="548640" y="411480"/>
-            <a:ext cx="11064240" cy="777240"/>
-          </a:xfrm>
-          <a:prstGeom prst="rect">
-            <a:avLst/>
-          </a:prstGeom>
-          <a:noFill/>
-        </p:spPr>
-        <p:txBody>
-          <a:bodyPr wrap="square">
-            <a:noAutofit/>
-          </a:bodyPr>
-          <a:lstStyle/>
-          <a:p>
-            <a:pPr>
-              <a:lnSpc>
-                <a:spcPts val="2200"/>
-              </a:lnSpc>
-            </a:pPr>
-            <a:r>
-              <a:rPr sz="2800" b="1">
-                <a:solidFill>
-                  <a:srgbClr val="1A1A2E"/>
-                </a:solidFill>
-                <a:latin typeface="Calibri"/>
-              </a:rPr>
-              <a:t>Implement track</a:t>
-            </a:r>
-          </a:p>
-        </p:txBody>
-      </p:sp>
-      <p:sp>
-        <p:nvSpPr>
-          <p:cNvPr id="3" name="TextBox 2"/>
-          <p:cNvSpPr txBox="1"/>
-          <p:nvPr/>
-        </p:nvSpPr>
-        <p:spPr>
-          <a:xfrm>
-            <a:off x="548640" y="1234440"/>
-            <a:ext cx="11064240" cy="4937760"/>
-          </a:xfrm>
-          <a:prstGeom prst="rect">
-            <a:avLst/>
-          </a:prstGeom>
-          <a:noFill/>
-        </p:spPr>
-        <p:txBody>
-          <a:bodyPr wrap="square">
-            <a:noAutofit/>
-          </a:bodyPr>
-          <a:lstStyle/>
-          <a:p>
-            <a:pPr lvl="0" marL="457200" indent="-228600">
-              <a:buFont typeface="Calibri"/>
-              <a:spcAft>
-                <a:spcPts val="1000"/>
-              </a:spcAft>
-              <a:buSzPct val="100000"/>
-              <a:buChar char="•"/>
-              <a:lnSpc>
-                <a:spcPts val="2200"/>
-              </a:lnSpc>
-            </a:pPr>
-            <a:r>
-              <a:rPr sz="2000" b="0">
-                <a:solidFill>
-                  <a:srgbClr val="333333"/>
-                </a:solidFill>
-                <a:latin typeface="Calibri"/>
-              </a:rPr>
-              <a:t>In the implement track, open this module's examples and the course `common/` solvers</a:t>
-            </a:r>
-          </a:p>
-          <a:p>
-            <a:pPr lvl="0" marL="457200" indent="-228600">
-              <a:buFont typeface="Calibri"/>
-              <a:spcAft>
-                <a:spcPts val="1000"/>
-              </a:spcAft>
-              <a:buSzPct val="100000"/>
-              <a:buChar char="•"/>
-              <a:lnSpc>
-                <a:spcPts val="2200"/>
-              </a:lnSpc>
-            </a:pPr>
-            <a:r>
-              <a:rPr sz="2000" b="0">
-                <a:solidFill>
-                  <a:srgbClr val="333333"/>
-                </a:solidFill>
-                <a:latin typeface="Calibri"/>
-              </a:rPr>
-              <a:t>Parse `tiny_legal.json`, run the algorithm with deterministic coordinates</a:t>
-            </a:r>
-          </a:p>
-          <a:p>
-            <a:pPr lvl="0" marL="457200" indent="-228600">
-              <a:buFont typeface="Calibri"/>
-              <a:spcAft>
-                <a:spcPts val="1000"/>
-              </a:spcAft>
-              <a:buSzPct val="100000"/>
-              <a:buChar char="•"/>
-              <a:lnSpc>
-                <a:spcPts val="2200"/>
-              </a:lnSpc>
-            </a:pPr>
-            <a:r>
-              <a:rPr sz="2000" b="0">
-                <a:solidFill>
-                  <a:srgbClr val="333333"/>
-                </a:solidFill>
-                <a:latin typeface="Calibri"/>
-              </a:rPr>
-              <a:t>Match the browser goldens before you claim the checklist</a:t>
-            </a:r>
-          </a:p>
-        </p:txBody>
-      </p:sp>
-      <p:sp>
-        <p:nvSpPr>
-          <p:cNvPr id="4" name="TextBox 3"/>
           <p:cNvSpPr txBox="1"/>
           <p:nvPr/>
         </p:nvSpPr>
